--- a/examples/ppt/tables/tables-styled.pptx
+++ b/examples/ppt/tables/tables-styled.pptx
@@ -5,17 +5,17 @@
     <p:sldMasterId xmlns:r="http://schemas.openxmlformats.org/officeDocument/2006/relationships" id="2147483648" r:id="rId1"/>
   </p:sldMasterIdLst>
   <p:sldIdLst>
-    <p:sldId id="256" r:id="R5e3fcb6526bb47f6"/>
-    <p:sldId id="257" r:id="R4553ae4b54584b3b"/>
-    <p:sldId id="258" r:id="R28177f0764284f33"/>
-    <p:sldId id="259" r:id="R8f0f198201a5479b"/>
-    <p:sldId id="260" r:id="Rfa93c5f2a01048b4"/>
-    <p:sldId id="261" r:id="R53f4cd43eab94420"/>
-    <p:sldId id="262" r:id="R992382501a1d4448"/>
-    <p:sldId id="263" r:id="Re2eb175ee444489d"/>
-    <p:sldId id="264" r:id="R8591a944254345fb"/>
-    <p:sldId id="265" r:id="R609b7045c20f4964"/>
-    <p:sldId id="266" r:id="R43aaf7c04d8d4823"/>
+    <p:sldId id="256" r:id="Ra17277ba80754fd3"/>
+    <p:sldId id="257" r:id="R1404de7164b04441"/>
+    <p:sldId id="258" r:id="R14d5a1b6898e4d79"/>
+    <p:sldId id="259" r:id="Re96b7badbb5c4f39"/>
+    <p:sldId id="260" r:id="Rc9075a78a75a43c6"/>
+    <p:sldId id="261" r:id="R1aac3c4232dd4961"/>
+    <p:sldId id="262" r:id="R6d9c7ed2d07e450e"/>
+    <p:sldId id="263" r:id="R6a8634b4d0f64233"/>
+    <p:sldId id="264" r:id="R73d0a3f73e4c406c"/>
+    <p:sldId id="265" r:id="Rd795b84f706b43b2"/>
+    <p:sldId id="266" r:id="R79e9bf413333436b"/>
   </p:sldIdLst>
   <p:sldSz cx="12192000" cy="6858000"/>
   <p:notesSz cx="6858000" cy="9144000"/>
@@ -313,7 +313,7 @@
 </file>
 
 <file path=ppt/slides/slide1.xml><?xml version="1.0" encoding="utf-8"?>
-<p:sld xmlns:a="http://schemas.openxmlformats.org/drawingml/2006/main" xmlns:p="http://schemas.openxmlformats.org/presentationml/2006/main">
+<p:sld xmlns:p="http://schemas.openxmlformats.org/presentationml/2006/main">
   <p:cSld>
     <p:spTree>
       <p:nvGrpSpPr>
@@ -324,8 +324,8 @@
       <p:grpSpPr/>
       <p:sp>
         <p:nvSpPr>
-          <p:cNvPr id="10000" name="TextBox 1"/>
-          <p:cNvSpPr/>
+          <p:cNvPr id="100000" name="TextBox 1"/>
+          <p:cNvSpPr txBox="1"/>
           <p:nvPr/>
         </p:nvSpPr>
         <p:spPr>
@@ -350,7 +350,7 @@
       </p:sp>
       <p:graphicFrame>
         <p:nvGraphicFramePr>
-          <p:cNvPr id="10001" name="Table 1"/>
+          <p:cNvPr id="100001" name="Table 1"/>
           <p:cNvGraphicFramePr/>
           <p:nvPr/>
         </p:nvGraphicFramePr>
@@ -716,7 +716,7 @@
 </file>
 
 <file path=ppt/slides/slide10.xml><?xml version="1.0" encoding="utf-8"?>
-<p:sld xmlns:a="http://schemas.openxmlformats.org/drawingml/2006/main" xmlns:p="http://schemas.openxmlformats.org/presentationml/2006/main">
+<p:sld xmlns:p="http://schemas.openxmlformats.org/presentationml/2006/main">
   <p:cSld>
     <p:spTree>
       <p:nvGrpSpPr>
@@ -727,8 +727,8 @@
       <p:grpSpPr/>
       <p:sp>
         <p:nvSpPr>
-          <p:cNvPr id="10018" name="TextBox 1"/>
-          <p:cNvSpPr/>
+          <p:cNvPr id="100018" name="TextBox 1"/>
+          <p:cNvSpPr txBox="1"/>
           <p:nvPr/>
         </p:nvSpPr>
         <p:spPr>
@@ -753,8 +753,8 @@
       </p:sp>
       <p:sp>
         <p:nvSpPr>
-          <p:cNvPr id="10019" name="TextBox 2"/>
-          <p:cNvSpPr/>
+          <p:cNvPr id="100019" name="TextBox 2"/>
+          <p:cNvSpPr txBox="1"/>
           <p:nvPr/>
         </p:nvSpPr>
         <p:spPr>
@@ -779,7 +779,7 @@
       </p:sp>
       <p:graphicFrame>
         <p:nvGraphicFramePr>
-          <p:cNvPr id="10020" name="Table 1"/>
+          <p:cNvPr id="100020" name="Table 1"/>
           <p:cNvGraphicFramePr/>
           <p:nvPr/>
         </p:nvGraphicFramePr>
@@ -1141,8 +1141,8 @@
       </p:graphicFrame>
       <p:sp>
         <p:nvSpPr>
-          <p:cNvPr id="10021" name="TextBox 3"/>
-          <p:cNvSpPr/>
+          <p:cNvPr id="100021" name="TextBox 3"/>
+          <p:cNvSpPr txBox="1"/>
           <p:nvPr/>
         </p:nvSpPr>
         <p:spPr>
@@ -1167,7 +1167,7 @@
       </p:sp>
       <p:graphicFrame>
         <p:nvGraphicFramePr>
-          <p:cNvPr id="10022" name="Table 2"/>
+          <p:cNvPr id="100022" name="Table 2"/>
           <p:cNvGraphicFramePr/>
           <p:nvPr/>
         </p:nvGraphicFramePr>
@@ -1529,8 +1529,8 @@
       </p:graphicFrame>
       <p:sp>
         <p:nvSpPr>
-          <p:cNvPr id="10023" name="TextBox 4"/>
-          <p:cNvSpPr/>
+          <p:cNvPr id="100023" name="TextBox 4"/>
+          <p:cNvSpPr txBox="1"/>
           <p:nvPr/>
         </p:nvSpPr>
         <p:spPr>
@@ -1555,7 +1555,7 @@
       </p:sp>
       <p:graphicFrame>
         <p:nvGraphicFramePr>
-          <p:cNvPr id="10024" name="Table 3"/>
+          <p:cNvPr id="100024" name="Table 3"/>
           <p:cNvGraphicFramePr/>
           <p:nvPr/>
         </p:nvGraphicFramePr>
@@ -1984,8 +1984,8 @@
       </p:graphicFrame>
       <p:sp>
         <p:nvSpPr>
-          <p:cNvPr id="10025" name="TextBox 5"/>
-          <p:cNvSpPr/>
+          <p:cNvPr id="100025" name="TextBox 5"/>
+          <p:cNvSpPr txBox="1"/>
           <p:nvPr/>
         </p:nvSpPr>
         <p:spPr>
@@ -2010,7 +2010,7 @@
       </p:sp>
       <p:graphicFrame>
         <p:nvGraphicFramePr>
-          <p:cNvPr id="10026" name="Table 4"/>
+          <p:cNvPr id="100026" name="Table 4"/>
           <p:cNvGraphicFramePr/>
           <p:nvPr/>
         </p:nvGraphicFramePr>
@@ -3001,7 +3001,7 @@
 </file>
 
 <file path=ppt/slides/slide11.xml><?xml version="1.0" encoding="utf-8"?>
-<p:sld xmlns:a="http://schemas.openxmlformats.org/drawingml/2006/main" xmlns:p="http://schemas.openxmlformats.org/presentationml/2006/main">
+<p:sld xmlns:p="http://schemas.openxmlformats.org/presentationml/2006/main">
   <p:cSld>
     <p:spTree>
       <p:nvGrpSpPr>
@@ -3012,8 +3012,8 @@
       <p:grpSpPr/>
       <p:sp>
         <p:nvSpPr>
-          <p:cNvPr id="10027" name="TextBox 1"/>
-          <p:cNvSpPr/>
+          <p:cNvPr id="100027" name="TextBox 1"/>
+          <p:cNvSpPr txBox="1"/>
           <p:nvPr/>
         </p:nvSpPr>
         <p:spPr>
@@ -3038,8 +3038,8 @@
       </p:sp>
       <p:sp>
         <p:nvSpPr>
-          <p:cNvPr id="10028" name="TextBox 2"/>
-          <p:cNvSpPr/>
+          <p:cNvPr id="100028" name="TextBox 2"/>
+          <p:cNvSpPr txBox="1"/>
           <p:nvPr/>
         </p:nvSpPr>
         <p:spPr>
@@ -3064,7 +3064,7 @@
       </p:sp>
       <p:graphicFrame>
         <p:nvGraphicFramePr>
-          <p:cNvPr id="10029" name="SalesData"/>
+          <p:cNvPr id="100029" name="SalesData"/>
           <p:cNvGraphicFramePr/>
           <p:nvPr/>
         </p:nvGraphicFramePr>
@@ -3368,7 +3368,7 @@
 </file>
 
 <file path=ppt/slides/slide2.xml><?xml version="1.0" encoding="utf-8"?>
-<p:sld xmlns:a="http://schemas.openxmlformats.org/drawingml/2006/main" xmlns:p="http://schemas.openxmlformats.org/presentationml/2006/main">
+<p:sld xmlns:p="http://schemas.openxmlformats.org/presentationml/2006/main">
   <p:cSld>
     <p:spTree>
       <p:nvGrpSpPr>
@@ -3379,8 +3379,8 @@
       <p:grpSpPr/>
       <p:sp>
         <p:nvSpPr>
-          <p:cNvPr id="10002" name="TextBox 1"/>
-          <p:cNvSpPr/>
+          <p:cNvPr id="100002" name="TextBox 1"/>
+          <p:cNvSpPr txBox="1"/>
           <p:nvPr/>
         </p:nvSpPr>
         <p:spPr>
@@ -3405,7 +3405,7 @@
       </p:sp>
       <p:graphicFrame>
         <p:nvGraphicFramePr>
-          <p:cNvPr id="10003" name="Table 1"/>
+          <p:cNvPr id="100003" name="Table 1"/>
           <p:cNvGraphicFramePr/>
           <p:nvPr/>
         </p:nvGraphicFramePr>
@@ -3771,7 +3771,7 @@
 </file>
 
 <file path=ppt/slides/slide3.xml><?xml version="1.0" encoding="utf-8"?>
-<p:sld xmlns:a="http://schemas.openxmlformats.org/drawingml/2006/main" xmlns:p="http://schemas.openxmlformats.org/presentationml/2006/main">
+<p:sld xmlns:p="http://schemas.openxmlformats.org/presentationml/2006/main">
   <p:cSld>
     <p:spTree>
       <p:nvGrpSpPr>
@@ -3782,8 +3782,8 @@
       <p:grpSpPr/>
       <p:sp>
         <p:nvSpPr>
-          <p:cNvPr id="10004" name="TextBox 1"/>
-          <p:cNvSpPr/>
+          <p:cNvPr id="100004" name="TextBox 1"/>
+          <p:cNvSpPr txBox="1"/>
           <p:nvPr/>
         </p:nvSpPr>
         <p:spPr>
@@ -3808,7 +3808,7 @@
       </p:sp>
       <p:graphicFrame>
         <p:nvGraphicFramePr>
-          <p:cNvPr id="10005" name="Table 1"/>
+          <p:cNvPr id="100005" name="Table 1"/>
           <p:cNvGraphicFramePr/>
           <p:nvPr/>
         </p:nvGraphicFramePr>
@@ -4174,7 +4174,7 @@
 </file>
 
 <file path=ppt/slides/slide4.xml><?xml version="1.0" encoding="utf-8"?>
-<p:sld xmlns:a="http://schemas.openxmlformats.org/drawingml/2006/main" xmlns:p="http://schemas.openxmlformats.org/presentationml/2006/main">
+<p:sld xmlns:p="http://schemas.openxmlformats.org/presentationml/2006/main">
   <p:cSld>
     <p:spTree>
       <p:nvGrpSpPr>
@@ -4185,8 +4185,8 @@
       <p:grpSpPr/>
       <p:sp>
         <p:nvSpPr>
-          <p:cNvPr id="10006" name="TextBox 1"/>
-          <p:cNvSpPr/>
+          <p:cNvPr id="100006" name="TextBox 1"/>
+          <p:cNvSpPr txBox="1"/>
           <p:nvPr/>
         </p:nvSpPr>
         <p:spPr>
@@ -4211,7 +4211,7 @@
       </p:sp>
       <p:graphicFrame>
         <p:nvGraphicFramePr>
-          <p:cNvPr id="10007" name="Table 1"/>
+          <p:cNvPr id="100007" name="Table 1"/>
           <p:cNvGraphicFramePr/>
           <p:nvPr/>
         </p:nvGraphicFramePr>
@@ -4577,7 +4577,7 @@
 </file>
 
 <file path=ppt/slides/slide5.xml><?xml version="1.0" encoding="utf-8"?>
-<p:sld xmlns:a="http://schemas.openxmlformats.org/drawingml/2006/main" xmlns:p="http://schemas.openxmlformats.org/presentationml/2006/main">
+<p:sld xmlns:p="http://schemas.openxmlformats.org/presentationml/2006/main">
   <p:cSld>
     <p:spTree>
       <p:nvGrpSpPr>
@@ -4588,8 +4588,8 @@
       <p:grpSpPr/>
       <p:sp>
         <p:nvSpPr>
-          <p:cNvPr id="10008" name="TextBox 1"/>
-          <p:cNvSpPr/>
+          <p:cNvPr id="100008" name="TextBox 1"/>
+          <p:cNvSpPr txBox="1"/>
           <p:nvPr/>
         </p:nvSpPr>
         <p:spPr>
@@ -4614,7 +4614,7 @@
       </p:sp>
       <p:graphicFrame>
         <p:nvGraphicFramePr>
-          <p:cNvPr id="10009" name="Table 1"/>
+          <p:cNvPr id="100009" name="Table 1"/>
           <p:cNvGraphicFramePr/>
           <p:nvPr/>
         </p:nvGraphicFramePr>
@@ -4980,7 +4980,7 @@
 </file>
 
 <file path=ppt/slides/slide6.xml><?xml version="1.0" encoding="utf-8"?>
-<p:sld xmlns:a="http://schemas.openxmlformats.org/drawingml/2006/main" xmlns:p="http://schemas.openxmlformats.org/presentationml/2006/main">
+<p:sld xmlns:p="http://schemas.openxmlformats.org/presentationml/2006/main">
   <p:cSld>
     <p:spTree>
       <p:nvGrpSpPr>
@@ -4991,8 +4991,8 @@
       <p:grpSpPr/>
       <p:sp>
         <p:nvSpPr>
-          <p:cNvPr id="10010" name="TextBox 1"/>
-          <p:cNvSpPr/>
+          <p:cNvPr id="100010" name="TextBox 1"/>
+          <p:cNvSpPr txBox="1"/>
           <p:nvPr/>
         </p:nvSpPr>
         <p:spPr>
@@ -5017,7 +5017,7 @@
       </p:sp>
       <p:graphicFrame>
         <p:nvGraphicFramePr>
-          <p:cNvPr id="10011" name="Table 1"/>
+          <p:cNvPr id="100011" name="Table 1"/>
           <p:cNvGraphicFramePr/>
           <p:nvPr/>
         </p:nvGraphicFramePr>
@@ -5383,7 +5383,7 @@
 </file>
 
 <file path=ppt/slides/slide7.xml><?xml version="1.0" encoding="utf-8"?>
-<p:sld xmlns:a="http://schemas.openxmlformats.org/drawingml/2006/main" xmlns:p="http://schemas.openxmlformats.org/presentationml/2006/main">
+<p:sld xmlns:p="http://schemas.openxmlformats.org/presentationml/2006/main">
   <p:cSld>
     <p:spTree>
       <p:nvGrpSpPr>
@@ -5394,8 +5394,8 @@
       <p:grpSpPr/>
       <p:sp>
         <p:nvSpPr>
-          <p:cNvPr id="10012" name="TextBox 1"/>
-          <p:cNvSpPr/>
+          <p:cNvPr id="100012" name="TextBox 1"/>
+          <p:cNvSpPr txBox="1"/>
           <p:nvPr/>
         </p:nvSpPr>
         <p:spPr>
@@ -5420,7 +5420,7 @@
       </p:sp>
       <p:graphicFrame>
         <p:nvGraphicFramePr>
-          <p:cNvPr id="10013" name="Table 1"/>
+          <p:cNvPr id="100013" name="Table 1"/>
           <p:cNvGraphicFramePr/>
           <p:nvPr/>
         </p:nvGraphicFramePr>
@@ -5786,7 +5786,7 @@
 </file>
 
 <file path=ppt/slides/slide8.xml><?xml version="1.0" encoding="utf-8"?>
-<p:sld xmlns:a="http://schemas.openxmlformats.org/drawingml/2006/main" xmlns:p="http://schemas.openxmlformats.org/presentationml/2006/main">
+<p:sld xmlns:p="http://schemas.openxmlformats.org/presentationml/2006/main">
   <p:cSld>
     <p:spTree>
       <p:nvGrpSpPr>
@@ -5797,8 +5797,8 @@
       <p:grpSpPr/>
       <p:sp>
         <p:nvSpPr>
-          <p:cNvPr id="10014" name="TextBox 1"/>
-          <p:cNvSpPr/>
+          <p:cNvPr id="100014" name="TextBox 1"/>
+          <p:cNvSpPr txBox="1"/>
           <p:nvPr/>
         </p:nvSpPr>
         <p:spPr>
@@ -5823,7 +5823,7 @@
       </p:sp>
       <p:graphicFrame>
         <p:nvGraphicFramePr>
-          <p:cNvPr id="10015" name="Table 1"/>
+          <p:cNvPr id="100015" name="Table 1"/>
           <p:cNvGraphicFramePr/>
           <p:nvPr/>
         </p:nvGraphicFramePr>
@@ -6189,7 +6189,7 @@
 </file>
 
 <file path=ppt/slides/slide9.xml><?xml version="1.0" encoding="utf-8"?>
-<p:sld xmlns:a="http://schemas.openxmlformats.org/drawingml/2006/main" xmlns:p="http://schemas.openxmlformats.org/presentationml/2006/main">
+<p:sld xmlns:p="http://schemas.openxmlformats.org/presentationml/2006/main">
   <p:cSld>
     <p:spTree>
       <p:nvGrpSpPr>
@@ -6200,8 +6200,8 @@
       <p:grpSpPr/>
       <p:sp>
         <p:nvSpPr>
-          <p:cNvPr id="10016" name="TextBox 1"/>
-          <p:cNvSpPr/>
+          <p:cNvPr id="100016" name="TextBox 1"/>
+          <p:cNvSpPr txBox="1"/>
           <p:nvPr/>
         </p:nvSpPr>
         <p:spPr>
@@ -6226,7 +6226,7 @@
       </p:sp>
       <p:graphicFrame>
         <p:nvGraphicFramePr>
-          <p:cNvPr id="10017" name="Table 1"/>
+          <p:cNvPr id="100017" name="Table 1"/>
           <p:cNvGraphicFramePr/>
           <p:nvPr/>
         </p:nvGraphicFramePr>
